--- a/Foundation_F5/Workshop/F5-W02_Apply_Workshop_L03-L04_The_Class_Food_Awards.pptx
+++ b/Foundation_F5/Workshop/F5-W02_Apply_Workshop_L03-L04_The_Class_Food_Awards.pptx
@@ -7436,7 +7436,7 @@
                 <a:latin typeface="Calibri" pitchFamily="34" charset="0"/>
                 <a:cs typeface="Amiri" pitchFamily="2" charset="-78"/>
               </a:rPr>
-              <a:t>Odd numbers come from F5-L03, even numbers from F5-L04. Core: a full sentence from the starter. Develop: add the “more” part. Stretch: link two answers with </a:t>
+              <a:t>Odd numbers come from F5-L03, even numbers from F5-L04. Core: a full sentence from the starter. Develop: add the “more” part. Stretch: link two answers with ‏</a:t>
             </a:r>
             <a:pPr algn="l" indent="0" marL="0">
               <a:buNone/>
@@ -7463,7 +7463,7 @@
                 <a:latin typeface="Calibri" pitchFamily="34" charset="0"/>
                 <a:cs typeface="Amiri" pitchFamily="2" charset="-78"/>
               </a:rPr>
-              <a:t>, </a:t>
+              <a:t>‏, ‏</a:t>
             </a:r>
             <a:pPr algn="l" indent="0" marL="0">
               <a:buNone/>
@@ -7490,7 +7490,7 @@
                 <a:latin typeface="Calibri" pitchFamily="34" charset="0"/>
                 <a:cs typeface="Amiri" pitchFamily="2" charset="-78"/>
               </a:rPr>
-              <a:t> or </a:t>
+              <a:t>‏ or ‏</a:t>
             </a:r>
             <a:pPr algn="l" indent="0" marL="0">
               <a:buNone/>
@@ -7517,7 +7517,7 @@
                 <a:latin typeface="Calibri" pitchFamily="34" charset="0"/>
                 <a:cs typeface="Amiri" pitchFamily="2" charset="-78"/>
               </a:rPr>
-              <a:t>. Swap after each question.</a:t>
+              <a:t>‏. Swap after each question.</a:t>
             </a:r>
             <a:endParaRPr lang="en-US" sz="1100" dirty="0"/>
           </a:p>
@@ -10123,7 +10123,7 @@
                 <a:latin typeface="Calibri" pitchFamily="34" charset="0"/>
                 <a:cs typeface="Amiri" pitchFamily="2" charset="-78"/>
               </a:rPr>
-              <a:t>Talk for 30–45 seconds and give your own food awards: the tastiest dish, the healthiest food, the best drink and the food you like least — each with a reason that agrees (</a:t>
+              <a:t>Talk for 30–45 seconds and give your own food awards: the tastiest dish, the healthiest food, the best drink and the food you like least — each with a reason that agrees (‏</a:t>
             </a:r>
             <a:pPr algn="l" indent="0" marL="0">
               <a:buNone/>
@@ -10150,7 +10150,7 @@
                 <a:latin typeface="Calibri" pitchFamily="34" charset="0"/>
                 <a:cs typeface="Amiri" pitchFamily="2" charset="-78"/>
               </a:rPr>
-              <a:t>).</a:t>
+              <a:t>‏).</a:t>
             </a:r>
             <a:endParaRPr lang="en-US" sz="1350" dirty="0"/>
           </a:p>
@@ -10867,7 +10867,7 @@
                 <a:latin typeface="Calibri" pitchFamily="34" charset="0"/>
                 <a:cs typeface="Amiri" pitchFamily="2" charset="-78"/>
               </a:rPr>
-              <a:t>A reason for each award: </a:t>
+              <a:t>A reason for each award: ‏</a:t>
             </a:r>
             <a:pPr algn="l" indent="0" marL="0">
               <a:buNone/>
@@ -10921,7 +10921,7 @@
                 <a:latin typeface="Calibri" pitchFamily="34" charset="0"/>
                 <a:cs typeface="Amiri" pitchFamily="2" charset="-78"/>
               </a:rPr>
-              <a:t>.</a:t>
+              <a:t>‏.</a:t>
             </a:r>
             <a:endParaRPr lang="en-US" sz="1150" dirty="0"/>
           </a:p>
@@ -11058,7 +11058,7 @@
                 <a:latin typeface="Calibri" pitchFamily="34" charset="0"/>
                 <a:cs typeface="Amiri" pitchFamily="2" charset="-78"/>
               </a:rPr>
-              <a:t>Add </a:t>
+              <a:t>Add ‏</a:t>
             </a:r>
             <a:pPr algn="l" indent="0" marL="0">
               <a:buNone/>
@@ -11085,7 +11085,7 @@
                 <a:latin typeface="Calibri" pitchFamily="34" charset="0"/>
                 <a:cs typeface="Amiri" pitchFamily="2" charset="-78"/>
               </a:rPr>
-              <a:t> … and an opinion with </a:t>
+              <a:t> …‏ and an opinion with ‏</a:t>
             </a:r>
             <a:pPr algn="l" indent="0" marL="0">
               <a:buNone/>
@@ -11112,7 +11112,7 @@
                 <a:latin typeface="Calibri" pitchFamily="34" charset="0"/>
                 <a:cs typeface="Amiri" pitchFamily="2" charset="-78"/>
               </a:rPr>
-              <a:t> …</a:t>
+              <a:t> …‏</a:t>
             </a:r>
             <a:endParaRPr lang="en-US" sz="1150" dirty="0"/>
           </a:p>
@@ -17700,7 +17700,7 @@
                 <a:latin typeface="Calibri" pitchFamily="34" charset="0"/>
                 <a:cs typeface="Amiri" pitchFamily="2" charset="-78"/>
               </a:rPr>
-              <a:t>Masculine → </a:t>
+              <a:t>Masculine → ‏</a:t>
             </a:r>
             <a:pPr algn="l" indent="0" marL="0">
               <a:buNone/>
@@ -17727,7 +17727,7 @@
                 <a:latin typeface="Calibri" pitchFamily="34" charset="0"/>
                 <a:cs typeface="Amiri" pitchFamily="2" charset="-78"/>
               </a:rPr>
-              <a:t>.</a:t>
+              <a:t>‏.</a:t>
             </a:r>
             <a:endParaRPr lang="en-US" sz="1150" dirty="0"/>
           </a:p>
@@ -17938,7 +17938,7 @@
                 <a:latin typeface="Calibri" pitchFamily="34" charset="0"/>
                 <a:cs typeface="Amiri" pitchFamily="2" charset="-78"/>
               </a:rPr>
-              <a:t>Masculine → </a:t>
+              <a:t>Masculine → ‏</a:t>
             </a:r>
             <a:pPr algn="l" indent="0" marL="0">
               <a:buNone/>
@@ -17965,7 +17965,7 @@
                 <a:latin typeface="Calibri" pitchFamily="34" charset="0"/>
                 <a:cs typeface="Amiri" pitchFamily="2" charset="-78"/>
               </a:rPr>
-              <a:t>.</a:t>
+              <a:t>‏.</a:t>
             </a:r>
             <a:endParaRPr lang="en-US" sz="1150" dirty="0"/>
           </a:p>
@@ -19936,7 +19936,7 @@
                 <a:latin typeface="Calibri" pitchFamily="34" charset="0"/>
                 <a:cs typeface="Amiri" pitchFamily="2" charset="-78"/>
               </a:rPr>
-              <a:t>Write your nominations (about 45–65 words) for the class food awards. Include: • the tastiest dish, with a reason • the healthiest food, with a reason • one preference with </a:t>
+              <a:t>Write your nominations (about 45–65 words) for the class food awards. Include: • the tastiest dish, with a reason • the healthiest food, with a reason • one preference with ‏</a:t>
             </a:r>
             <a:pPr algn="l" indent="0" marL="0">
               <a:buNone/>
@@ -19963,7 +19963,7 @@
                 <a:latin typeface="Calibri" pitchFamily="34" charset="0"/>
                 <a:cs typeface="Amiri" pitchFamily="2" charset="-78"/>
               </a:rPr>
-              <a:t> … • one comparison with </a:t>
+              <a:t> …‏ • one comparison with ‏</a:t>
             </a:r>
             <a:pPr algn="l" indent="0" marL="0">
               <a:buNone/>
@@ -19990,7 +19990,7 @@
                 <a:latin typeface="Calibri" pitchFamily="34" charset="0"/>
                 <a:cs typeface="Amiri" pitchFamily="2" charset="-78"/>
               </a:rPr>
-              <a:t> • a food you don’t like, with a reason • what a family member prefers.</a:t>
+              <a:t>‏ • a food you don’t like, with a reason • what a family member prefers.</a:t>
             </a:r>
             <a:endParaRPr lang="en-US" sz="1100" dirty="0"/>
           </a:p>
@@ -20142,7 +20142,7 @@
                 <a:latin typeface="Calibri" pitchFamily="34" charset="0"/>
                 <a:cs typeface="Amiri" pitchFamily="2" charset="-78"/>
               </a:rPr>
-              <a:t>☐  At least one </a:t>
+              <a:t>☐  At least one ‏</a:t>
             </a:r>
             <a:pPr algn="l" indent="0" marL="0">
               <a:buNone/>
@@ -20169,7 +20169,7 @@
                 <a:latin typeface="Calibri" pitchFamily="34" charset="0"/>
                 <a:cs typeface="Amiri" pitchFamily="2" charset="-78"/>
               </a:rPr>
-              <a:t> and one </a:t>
+              <a:t>‏ and one ‏</a:t>
             </a:r>
             <a:pPr algn="l" indent="0" marL="0">
               <a:buNone/>
@@ -20196,7 +20196,7 @@
                 <a:latin typeface="Calibri" pitchFamily="34" charset="0"/>
                 <a:cs typeface="Amiri" pitchFamily="2" charset="-78"/>
               </a:rPr>
-              <a:t> (Develop).</a:t>
+              <a:t>‏ (Develop).</a:t>
             </a:r>
             <a:endParaRPr lang="en-US" sz="1200" dirty="0"/>
           </a:p>
@@ -23520,7 +23520,7 @@
                 <a:latin typeface="Calibri" pitchFamily="34" charset="0"/>
                 <a:cs typeface="Amiri" pitchFamily="2" charset="-78"/>
               </a:rPr>
-              <a:t>use </a:t>
+              <a:t>use ‏</a:t>
             </a:r>
             <a:pPr algn="l" indent="0" marL="0">
               <a:buNone/>
@@ -23547,7 +23547,7 @@
                 <a:latin typeface="Calibri" pitchFamily="34" charset="0"/>
                 <a:cs typeface="Amiri" pitchFamily="2" charset="-78"/>
               </a:rPr>
-              <a:t> … correctly?</a:t>
+              <a:t> …‏ correctly?</a:t>
             </a:r>
             <a:endParaRPr lang="en-US" sz="1100" dirty="0"/>
           </a:p>
@@ -23930,7 +23930,7 @@
                 <a:latin typeface="Calibri" pitchFamily="34" charset="0"/>
                 <a:cs typeface="Amiri" pitchFamily="2" charset="-78"/>
               </a:rPr>
-              <a:t>use linking words (</a:t>
+              <a:t>use linking words (‏</a:t>
             </a:r>
             <a:pPr algn="l" indent="0" marL="0">
               <a:buNone/>
@@ -24038,7 +24038,7 @@
                 <a:latin typeface="Calibri" pitchFamily="34" charset="0"/>
                 <a:cs typeface="Amiri" pitchFamily="2" charset="-78"/>
               </a:rPr>
-              <a:t>)?</a:t>
+              <a:t>‏)?</a:t>
             </a:r>
             <a:endParaRPr lang="en-US" sz="1100" dirty="0"/>
           </a:p>
@@ -27984,7 +27984,7 @@
                 <a:latin typeface="Calibri" pitchFamily="34" charset="0"/>
                 <a:cs typeface="Amiri" pitchFamily="2" charset="-78"/>
               </a:rPr>
-              <a:t>I added reasons (</a:t>
+              <a:t>I added reasons (‏</a:t>
             </a:r>
             <a:pPr algn="l" indent="0" marL="0">
               <a:buNone/>
@@ -28011,7 +28011,7 @@
                 <a:latin typeface="Calibri" pitchFamily="34" charset="0"/>
                 <a:cs typeface="Amiri" pitchFamily="2" charset="-78"/>
               </a:rPr>
-              <a:t>) and extra details without frames.</a:t>
+              <a:t>‏) and extra details without frames.</a:t>
             </a:r>
             <a:endParaRPr lang="en-US" sz="1300" dirty="0"/>
           </a:p>
@@ -32139,7 +32139,7 @@
                 <a:latin typeface="Calibri" pitchFamily="34" charset="0"/>
                 <a:cs typeface="Amiri" pitchFamily="2" charset="-78"/>
               </a:rPr>
-              <a:t>☐  Add a reason (</a:t>
+              <a:t>☐  Add a reason (‏</a:t>
             </a:r>
             <a:pPr algn="l" indent="0" marL="0">
               <a:buNone/>
@@ -32166,7 +32166,7 @@
                 <a:latin typeface="Calibri" pitchFamily="34" charset="0"/>
                 <a:cs typeface="Amiri" pitchFamily="2" charset="-78"/>
               </a:rPr>
-              <a:t>) and an extra detail to every point.</a:t>
+              <a:t>‏) and an extra detail to every point.</a:t>
             </a:r>
             <a:endParaRPr lang="en-US" sz="1300" dirty="0"/>
           </a:p>
@@ -33687,7 +33687,7 @@
                 <a:latin typeface="Calibri" pitchFamily="34" charset="0"/>
                 <a:cs typeface="Amiri" pitchFamily="2" charset="-78"/>
               </a:rPr>
-              <a:t>Join a word from each lesson in one sentence with </a:t>
+              <a:t>Join a word from each lesson in one sentence with ‏</a:t>
             </a:r>
             <a:pPr algn="l" indent="0" marL="0">
               <a:buNone/>
@@ -33714,7 +33714,7 @@
                 <a:latin typeface="Calibri" pitchFamily="34" charset="0"/>
                 <a:cs typeface="Amiri" pitchFamily="2" charset="-78"/>
               </a:rPr>
-              <a:t> or </a:t>
+              <a:t>‏ or ‏</a:t>
             </a:r>
             <a:pPr algn="l" indent="0" marL="0">
               <a:buNone/>
@@ -33741,7 +33741,7 @@
                 <a:latin typeface="Calibri" pitchFamily="34" charset="0"/>
                 <a:cs typeface="Amiri" pitchFamily="2" charset="-78"/>
               </a:rPr>
-              <a:t>.</a:t>
+              <a:t>‏.</a:t>
             </a:r>
             <a:endParaRPr lang="en-US" sz="1150" dirty="0"/>
           </a:p>
